--- a/story2/story2v2.pptx
+++ b/story2/story2v2.pptx
@@ -209,7 +209,7 @@
           <a:p>
             <a:fld id="{0986B2F1-DCFA-1D43-8372-1981236FBC91}" type="datetimeFigureOut">
               <a:rPr lang="en-US" smtClean="0"/>
-              <a:t>3/4/26</a:t>
+              <a:t>3/9/26</a:t>
             </a:fld>
             <a:endParaRPr lang="en-US" dirty="0"/>
           </a:p>
@@ -1322,7 +1322,7 @@
           <a:p>
             <a:fld id="{18382DDE-A2D8-E647-B7C4-54DBC0C27FC1}" type="datetimeFigureOut">
               <a:rPr lang="en-US" smtClean="0"/>
-              <a:t>3/4/26</a:t>
+              <a:t>3/9/26</a:t>
             </a:fld>
             <a:endParaRPr lang="en-US" dirty="0"/>
           </a:p>
@@ -1520,7 +1520,7 @@
           <a:p>
             <a:fld id="{18382DDE-A2D8-E647-B7C4-54DBC0C27FC1}" type="datetimeFigureOut">
               <a:rPr lang="en-US" smtClean="0"/>
-              <a:t>3/4/26</a:t>
+              <a:t>3/9/26</a:t>
             </a:fld>
             <a:endParaRPr lang="en-US" dirty="0"/>
           </a:p>
@@ -1728,7 +1728,7 @@
           <a:p>
             <a:fld id="{18382DDE-A2D8-E647-B7C4-54DBC0C27FC1}" type="datetimeFigureOut">
               <a:rPr lang="en-US" smtClean="0"/>
-              <a:t>3/4/26</a:t>
+              <a:t>3/9/26</a:t>
             </a:fld>
             <a:endParaRPr lang="en-US" dirty="0"/>
           </a:p>
@@ -1926,7 +1926,7 @@
           <a:p>
             <a:fld id="{18382DDE-A2D8-E647-B7C4-54DBC0C27FC1}" type="datetimeFigureOut">
               <a:rPr lang="en-US" smtClean="0"/>
-              <a:t>3/4/26</a:t>
+              <a:t>3/9/26</a:t>
             </a:fld>
             <a:endParaRPr lang="en-US" dirty="0"/>
           </a:p>
@@ -2201,7 +2201,7 @@
           <a:p>
             <a:fld id="{18382DDE-A2D8-E647-B7C4-54DBC0C27FC1}" type="datetimeFigureOut">
               <a:rPr lang="en-US" smtClean="0"/>
-              <a:t>3/4/26</a:t>
+              <a:t>3/9/26</a:t>
             </a:fld>
             <a:endParaRPr lang="en-US" dirty="0"/>
           </a:p>
@@ -2466,7 +2466,7 @@
           <a:p>
             <a:fld id="{18382DDE-A2D8-E647-B7C4-54DBC0C27FC1}" type="datetimeFigureOut">
               <a:rPr lang="en-US" smtClean="0"/>
-              <a:t>3/4/26</a:t>
+              <a:t>3/9/26</a:t>
             </a:fld>
             <a:endParaRPr lang="en-US" dirty="0"/>
           </a:p>
@@ -2878,7 +2878,7 @@
           <a:p>
             <a:fld id="{18382DDE-A2D8-E647-B7C4-54DBC0C27FC1}" type="datetimeFigureOut">
               <a:rPr lang="en-US" smtClean="0"/>
-              <a:t>3/4/26</a:t>
+              <a:t>3/9/26</a:t>
             </a:fld>
             <a:endParaRPr lang="en-US" dirty="0"/>
           </a:p>
@@ -3019,7 +3019,7 @@
           <a:p>
             <a:fld id="{18382DDE-A2D8-E647-B7C4-54DBC0C27FC1}" type="datetimeFigureOut">
               <a:rPr lang="en-US" smtClean="0"/>
-              <a:t>3/4/26</a:t>
+              <a:t>3/9/26</a:t>
             </a:fld>
             <a:endParaRPr lang="en-US" dirty="0"/>
           </a:p>
@@ -3132,7 +3132,7 @@
           <a:p>
             <a:fld id="{18382DDE-A2D8-E647-B7C4-54DBC0C27FC1}" type="datetimeFigureOut">
               <a:rPr lang="en-US" smtClean="0"/>
-              <a:t>3/4/26</a:t>
+              <a:t>3/9/26</a:t>
             </a:fld>
             <a:endParaRPr lang="en-US" dirty="0"/>
           </a:p>
@@ -3443,7 +3443,7 @@
           <a:p>
             <a:fld id="{18382DDE-A2D8-E647-B7C4-54DBC0C27FC1}" type="datetimeFigureOut">
               <a:rPr lang="en-US" smtClean="0"/>
-              <a:t>3/4/26</a:t>
+              <a:t>3/9/26</a:t>
             </a:fld>
             <a:endParaRPr lang="en-US" dirty="0"/>
           </a:p>
@@ -3731,7 +3731,7 @@
           <a:p>
             <a:fld id="{18382DDE-A2D8-E647-B7C4-54DBC0C27FC1}" type="datetimeFigureOut">
               <a:rPr lang="en-US" smtClean="0"/>
-              <a:t>3/4/26</a:t>
+              <a:t>3/9/26</a:t>
             </a:fld>
             <a:endParaRPr lang="en-US" dirty="0"/>
           </a:p>
@@ -3972,7 +3972,7 @@
           <a:p>
             <a:fld id="{18382DDE-A2D8-E647-B7C4-54DBC0C27FC1}" type="datetimeFigureOut">
               <a:rPr lang="en-US" smtClean="0"/>
-              <a:t>3/4/26</a:t>
+              <a:t>3/9/26</a:t>
             </a:fld>
             <a:endParaRPr lang="en-US" dirty="0"/>
           </a:p>
@@ -4496,6 +4496,28 @@
             <a:r>
               <a:rPr lang="en-US" sz="1800" dirty="0"/>
               <a:t>February 22, 2026</a:t>
+            </a:r>
+          </a:p>
+          <a:p>
+            <a:pPr algn="l">
+              <a:lnSpc>
+                <a:spcPct val="100000"/>
+              </a:lnSpc>
+              <a:spcBef>
+                <a:spcPts val="0"/>
+              </a:spcBef>
+            </a:pPr>
+            <a:r>
+              <a:rPr lang="en-US" sz="1800" dirty="0"/>
+              <a:t>Focus</a:t>
+            </a:r>
+            <a:r>
+              <a:rPr lang="en-US" sz="1800"/>
+              <a:t>: Chart </a:t>
+            </a:r>
+            <a:r>
+              <a:rPr lang="en-US" sz="1800" dirty="0"/>
+              <a:t>Focus</a:t>
             </a:r>
           </a:p>
         </p:txBody>
